--- a/ゲーム科1年/00_前期/ゲームプログラミングⅠ/05_画像の移動.pptx
+++ b/ゲーム科1年/00_前期/ゲームプログラミングⅠ/05_画像の移動.pptx
@@ -269,7 +269,7 @@
           <a:p>
             <a:fld id="{E9CC885B-4903-4D54-9A93-00025F12DED9}" type="datetimeFigureOut">
               <a:rPr kumimoji="1" lang="ja-JP" altLang="en-US" smtClean="0"/>
-              <a:t>2024/9/4</a:t>
+              <a:t>2025/1/6</a:t>
             </a:fld>
             <a:endParaRPr kumimoji="1" lang="ja-JP" altLang="en-US"/>
           </a:p>
@@ -499,7 +499,7 @@
           <a:p>
             <a:fld id="{E9CC885B-4903-4D54-9A93-00025F12DED9}" type="datetimeFigureOut">
               <a:rPr kumimoji="1" lang="ja-JP" altLang="en-US" smtClean="0"/>
-              <a:t>2024/9/4</a:t>
+              <a:t>2025/1/6</a:t>
             </a:fld>
             <a:endParaRPr kumimoji="1" lang="ja-JP" altLang="en-US"/>
           </a:p>
@@ -739,7 +739,7 @@
           <a:p>
             <a:fld id="{E9CC885B-4903-4D54-9A93-00025F12DED9}" type="datetimeFigureOut">
               <a:rPr kumimoji="1" lang="ja-JP" altLang="en-US" smtClean="0"/>
-              <a:t>2024/9/4</a:t>
+              <a:t>2025/1/6</a:t>
             </a:fld>
             <a:endParaRPr kumimoji="1" lang="ja-JP" altLang="en-US"/>
           </a:p>
@@ -969,7 +969,7 @@
           <a:p>
             <a:fld id="{E9CC885B-4903-4D54-9A93-00025F12DED9}" type="datetimeFigureOut">
               <a:rPr kumimoji="1" lang="ja-JP" altLang="en-US" smtClean="0"/>
-              <a:t>2024/9/4</a:t>
+              <a:t>2025/1/6</a:t>
             </a:fld>
             <a:endParaRPr kumimoji="1" lang="ja-JP" altLang="en-US"/>
           </a:p>
@@ -1244,7 +1244,7 @@
           <a:p>
             <a:fld id="{E9CC885B-4903-4D54-9A93-00025F12DED9}" type="datetimeFigureOut">
               <a:rPr kumimoji="1" lang="ja-JP" altLang="en-US" smtClean="0"/>
-              <a:t>2024/9/4</a:t>
+              <a:t>2025/1/6</a:t>
             </a:fld>
             <a:endParaRPr kumimoji="1" lang="ja-JP" altLang="en-US"/>
           </a:p>
@@ -1573,7 +1573,7 @@
           <a:p>
             <a:fld id="{E9CC885B-4903-4D54-9A93-00025F12DED9}" type="datetimeFigureOut">
               <a:rPr kumimoji="1" lang="ja-JP" altLang="en-US" smtClean="0"/>
-              <a:t>2024/9/4</a:t>
+              <a:t>2025/1/6</a:t>
             </a:fld>
             <a:endParaRPr kumimoji="1" lang="ja-JP" altLang="en-US"/>
           </a:p>
@@ -2049,7 +2049,7 @@
           <a:p>
             <a:fld id="{E9CC885B-4903-4D54-9A93-00025F12DED9}" type="datetimeFigureOut">
               <a:rPr kumimoji="1" lang="ja-JP" altLang="en-US" smtClean="0"/>
-              <a:t>2024/9/4</a:t>
+              <a:t>2025/1/6</a:t>
             </a:fld>
             <a:endParaRPr kumimoji="1" lang="ja-JP" altLang="en-US"/>
           </a:p>
@@ -2190,7 +2190,7 @@
           <a:p>
             <a:fld id="{E9CC885B-4903-4D54-9A93-00025F12DED9}" type="datetimeFigureOut">
               <a:rPr kumimoji="1" lang="ja-JP" altLang="en-US" smtClean="0"/>
-              <a:t>2024/9/4</a:t>
+              <a:t>2025/1/6</a:t>
             </a:fld>
             <a:endParaRPr kumimoji="1" lang="ja-JP" altLang="en-US"/>
           </a:p>
@@ -2303,7 +2303,7 @@
           <a:p>
             <a:fld id="{E9CC885B-4903-4D54-9A93-00025F12DED9}" type="datetimeFigureOut">
               <a:rPr kumimoji="1" lang="ja-JP" altLang="en-US" smtClean="0"/>
-              <a:t>2024/9/4</a:t>
+              <a:t>2025/1/6</a:t>
             </a:fld>
             <a:endParaRPr kumimoji="1" lang="ja-JP" altLang="en-US"/>
           </a:p>
@@ -2646,7 +2646,7 @@
           <a:p>
             <a:fld id="{E9CC885B-4903-4D54-9A93-00025F12DED9}" type="datetimeFigureOut">
               <a:rPr kumimoji="1" lang="ja-JP" altLang="en-US" smtClean="0"/>
-              <a:t>2024/9/4</a:t>
+              <a:t>2025/1/6</a:t>
             </a:fld>
             <a:endParaRPr kumimoji="1" lang="ja-JP" altLang="en-US"/>
           </a:p>
@@ -2934,7 +2934,7 @@
           <a:p>
             <a:fld id="{E9CC885B-4903-4D54-9A93-00025F12DED9}" type="datetimeFigureOut">
               <a:rPr kumimoji="1" lang="ja-JP" altLang="en-US" smtClean="0"/>
-              <a:t>2024/9/4</a:t>
+              <a:t>2025/1/6</a:t>
             </a:fld>
             <a:endParaRPr kumimoji="1" lang="ja-JP" altLang="en-US"/>
           </a:p>
@@ -3207,7 +3207,7 @@
           <a:p>
             <a:fld id="{E9CC885B-4903-4D54-9A93-00025F12DED9}" type="datetimeFigureOut">
               <a:rPr kumimoji="1" lang="ja-JP" altLang="en-US" smtClean="0"/>
-              <a:t>2024/9/4</a:t>
+              <a:t>2025/1/6</a:t>
             </a:fld>
             <a:endParaRPr kumimoji="1" lang="ja-JP" altLang="en-US"/>
           </a:p>
@@ -4347,10 +4347,10 @@
       </p:sp>
       <p:pic>
         <p:nvPicPr>
-          <p:cNvPr id="5" name="図 4">
-            <a:extLst>
-              <a:ext uri="{FF2B5EF4-FFF2-40B4-BE49-F238E27FC236}">
-                <a16:creationId xmlns:a16="http://schemas.microsoft.com/office/drawing/2014/main" id="{F2C75864-2C1F-4D3C-AE5E-273EFAF99BF7}"/>
+          <p:cNvPr id="3" name="図 2">
+            <a:extLst>
+              <a:ext uri="{FF2B5EF4-FFF2-40B4-BE49-F238E27FC236}">
+                <a16:creationId xmlns:a16="http://schemas.microsoft.com/office/drawing/2014/main" id="{06F12977-6B44-4AFC-9370-2B8FD488176E}"/>
               </a:ext>
             </a:extLst>
           </p:cNvPr>
@@ -4360,27 +4360,73 @@
           <p:nvPr/>
         </p:nvPicPr>
         <p:blipFill>
-          <a:blip r:embed="rId2">
-            <a:extLst>
-              <a:ext uri="{28A0092B-C50C-407E-A947-70E740481C1C}">
-                <a14:useLocalDpi xmlns:a14="http://schemas.microsoft.com/office/drawing/2010/main" val="0"/>
-              </a:ext>
-            </a:extLst>
-          </a:blip>
+          <a:blip r:embed="rId2"/>
           <a:stretch>
             <a:fillRect/>
           </a:stretch>
         </p:blipFill>
         <p:spPr>
           <a:xfrm>
-            <a:off x="567542" y="1817794"/>
-            <a:ext cx="7020905" cy="4353533"/>
+            <a:off x="567542" y="1811986"/>
+            <a:ext cx="7284230" cy="4554059"/>
           </a:xfrm>
           <a:prstGeom prst="rect">
             <a:avLst/>
           </a:prstGeom>
         </p:spPr>
       </p:pic>
+      <p:sp>
+        <p:nvSpPr>
+          <p:cNvPr id="7" name="正方形/長方形 6">
+            <a:extLst>
+              <a:ext uri="{FF2B5EF4-FFF2-40B4-BE49-F238E27FC236}">
+                <a16:creationId xmlns:a16="http://schemas.microsoft.com/office/drawing/2014/main" id="{6FAB8EFB-938A-489C-B52E-C768A1FE855B}"/>
+              </a:ext>
+            </a:extLst>
+          </p:cNvPr>
+          <p:cNvSpPr/>
+          <p:nvPr/>
+        </p:nvSpPr>
+        <p:spPr>
+          <a:xfrm>
+            <a:off x="1930400" y="3429000"/>
+            <a:ext cx="5825067" cy="2836333"/>
+          </a:xfrm>
+          <a:prstGeom prst="rect">
+            <a:avLst/>
+          </a:prstGeom>
+          <a:noFill/>
+          <a:ln w="38100">
+            <a:solidFill>
+              <a:srgbClr val="FF0000"/>
+            </a:solidFill>
+          </a:ln>
+        </p:spPr>
+        <p:style>
+          <a:lnRef idx="2">
+            <a:schemeClr val="accent1">
+              <a:shade val="50000"/>
+            </a:schemeClr>
+          </a:lnRef>
+          <a:fillRef idx="1">
+            <a:schemeClr val="accent1"/>
+          </a:fillRef>
+          <a:effectRef idx="0">
+            <a:schemeClr val="accent1"/>
+          </a:effectRef>
+          <a:fontRef idx="minor">
+            <a:schemeClr val="lt1"/>
+          </a:fontRef>
+        </p:style>
+        <p:txBody>
+          <a:bodyPr rtlCol="0" anchor="ctr"/>
+          <a:lstStyle/>
+          <a:p>
+            <a:pPr algn="ctr"/>
+            <a:endParaRPr kumimoji="1" lang="ja-JP" altLang="en-US"/>
+          </a:p>
+        </p:txBody>
+      </p:sp>
     </p:spTree>
     <p:extLst>
       <p:ext uri="{BB962C8B-B14F-4D97-AF65-F5344CB8AC3E}">
@@ -4523,6 +4569,58 @@
           </a:prstGeom>
         </p:spPr>
       </p:pic>
+      <p:sp>
+        <p:nvSpPr>
+          <p:cNvPr id="5" name="正方形/長方形 4">
+            <a:extLst>
+              <a:ext uri="{FF2B5EF4-FFF2-40B4-BE49-F238E27FC236}">
+                <a16:creationId xmlns:a16="http://schemas.microsoft.com/office/drawing/2014/main" id="{039BE4AD-B5FE-4020-8A62-EEC821A28DDD}"/>
+              </a:ext>
+            </a:extLst>
+          </p:cNvPr>
+          <p:cNvSpPr/>
+          <p:nvPr/>
+        </p:nvSpPr>
+        <p:spPr>
+          <a:xfrm>
+            <a:off x="2302933" y="3022601"/>
+            <a:ext cx="4351867" cy="1143000"/>
+          </a:xfrm>
+          <a:prstGeom prst="rect">
+            <a:avLst/>
+          </a:prstGeom>
+          <a:noFill/>
+          <a:ln w="38100">
+            <a:solidFill>
+              <a:srgbClr val="FF0000"/>
+            </a:solidFill>
+          </a:ln>
+        </p:spPr>
+        <p:style>
+          <a:lnRef idx="2">
+            <a:schemeClr val="accent1">
+              <a:shade val="50000"/>
+            </a:schemeClr>
+          </a:lnRef>
+          <a:fillRef idx="1">
+            <a:schemeClr val="accent1"/>
+          </a:fillRef>
+          <a:effectRef idx="0">
+            <a:schemeClr val="accent1"/>
+          </a:effectRef>
+          <a:fontRef idx="minor">
+            <a:schemeClr val="lt1"/>
+          </a:fontRef>
+        </p:style>
+        <p:txBody>
+          <a:bodyPr rtlCol="0" anchor="ctr"/>
+          <a:lstStyle/>
+          <a:p>
+            <a:pPr algn="ctr"/>
+            <a:endParaRPr kumimoji="1" lang="ja-JP" altLang="en-US"/>
+          </a:p>
+        </p:txBody>
+      </p:sp>
     </p:spTree>
     <p:extLst>
       <p:ext uri="{BB962C8B-B14F-4D97-AF65-F5344CB8AC3E}">
@@ -4721,6 +4819,58 @@
           </a:p>
         </p:txBody>
       </p:sp>
+      <p:sp>
+        <p:nvSpPr>
+          <p:cNvPr id="8" name="正方形/長方形 7">
+            <a:extLst>
+              <a:ext uri="{FF2B5EF4-FFF2-40B4-BE49-F238E27FC236}">
+                <a16:creationId xmlns:a16="http://schemas.microsoft.com/office/drawing/2014/main" id="{EE4EC1A5-8B9F-462A-A6D5-86199A5486C4}"/>
+              </a:ext>
+            </a:extLst>
+          </p:cNvPr>
+          <p:cNvSpPr/>
+          <p:nvPr/>
+        </p:nvSpPr>
+        <p:spPr>
+          <a:xfrm>
+            <a:off x="2150532" y="3835399"/>
+            <a:ext cx="9473925" cy="702733"/>
+          </a:xfrm>
+          <a:prstGeom prst="rect">
+            <a:avLst/>
+          </a:prstGeom>
+          <a:noFill/>
+          <a:ln w="38100">
+            <a:solidFill>
+              <a:srgbClr val="FF0000"/>
+            </a:solidFill>
+          </a:ln>
+        </p:spPr>
+        <p:style>
+          <a:lnRef idx="2">
+            <a:schemeClr val="accent1">
+              <a:shade val="50000"/>
+            </a:schemeClr>
+          </a:lnRef>
+          <a:fillRef idx="1">
+            <a:schemeClr val="accent1"/>
+          </a:fillRef>
+          <a:effectRef idx="0">
+            <a:schemeClr val="accent1"/>
+          </a:effectRef>
+          <a:fontRef idx="minor">
+            <a:schemeClr val="lt1"/>
+          </a:fontRef>
+        </p:style>
+        <p:txBody>
+          <a:bodyPr rtlCol="0" anchor="ctr"/>
+          <a:lstStyle/>
+          <a:p>
+            <a:pPr algn="ctr"/>
+            <a:endParaRPr kumimoji="1" lang="ja-JP" altLang="en-US"/>
+          </a:p>
+        </p:txBody>
+      </p:sp>
     </p:spTree>
     <p:extLst>
       <p:ext uri="{BB962C8B-B14F-4D97-AF65-F5344CB8AC3E}">
@@ -4896,6 +5046,58 @@
               <a:t>実行すると雲が右から流れてくるはずです。</a:t>
             </a:r>
             <a:endParaRPr kumimoji="1" lang="en-US" altLang="ja-JP" sz="2400" dirty="0"/>
+          </a:p>
+        </p:txBody>
+      </p:sp>
+      <p:sp>
+        <p:nvSpPr>
+          <p:cNvPr id="7" name="正方形/長方形 6">
+            <a:extLst>
+              <a:ext uri="{FF2B5EF4-FFF2-40B4-BE49-F238E27FC236}">
+                <a16:creationId xmlns:a16="http://schemas.microsoft.com/office/drawing/2014/main" id="{A3C5064D-5F17-4BAE-9830-B54E4388DDA9}"/>
+              </a:ext>
+            </a:extLst>
+          </p:cNvPr>
+          <p:cNvSpPr/>
+          <p:nvPr/>
+        </p:nvSpPr>
+        <p:spPr>
+          <a:xfrm>
+            <a:off x="2286000" y="4495800"/>
+            <a:ext cx="5469467" cy="897467"/>
+          </a:xfrm>
+          <a:prstGeom prst="rect">
+            <a:avLst/>
+          </a:prstGeom>
+          <a:noFill/>
+          <a:ln w="38100">
+            <a:solidFill>
+              <a:srgbClr val="FF0000"/>
+            </a:solidFill>
+          </a:ln>
+        </p:spPr>
+        <p:style>
+          <a:lnRef idx="2">
+            <a:schemeClr val="accent1">
+              <a:shade val="50000"/>
+            </a:schemeClr>
+          </a:lnRef>
+          <a:fillRef idx="1">
+            <a:schemeClr val="accent1"/>
+          </a:fillRef>
+          <a:effectRef idx="0">
+            <a:schemeClr val="accent1"/>
+          </a:effectRef>
+          <a:fontRef idx="minor">
+            <a:schemeClr val="lt1"/>
+          </a:fontRef>
+        </p:style>
+        <p:txBody>
+          <a:bodyPr rtlCol="0" anchor="ctr"/>
+          <a:lstStyle/>
+          <a:p>
+            <a:pPr algn="ctr"/>
+            <a:endParaRPr kumimoji="1" lang="ja-JP" altLang="en-US"/>
           </a:p>
         </p:txBody>
       </p:sp>
@@ -5217,10 +5419,10 @@
       </p:sp>
       <p:pic>
         <p:nvPicPr>
-          <p:cNvPr id="5" name="図 4">
-            <a:extLst>
-              <a:ext uri="{FF2B5EF4-FFF2-40B4-BE49-F238E27FC236}">
-                <a16:creationId xmlns:a16="http://schemas.microsoft.com/office/drawing/2014/main" id="{7515BB16-DB3B-4E5D-A284-CB3F8EF0E98A}"/>
+          <p:cNvPr id="7" name="図 6">
+            <a:extLst>
+              <a:ext uri="{FF2B5EF4-FFF2-40B4-BE49-F238E27FC236}">
+                <a16:creationId xmlns:a16="http://schemas.microsoft.com/office/drawing/2014/main" id="{2F6B5994-C33F-4766-AEDA-D6332EC7C622}"/>
               </a:ext>
             </a:extLst>
           </p:cNvPr>
@@ -5230,21 +5432,15 @@
           <p:nvPr/>
         </p:nvPicPr>
         <p:blipFill>
-          <a:blip r:embed="rId2">
-            <a:extLst>
-              <a:ext uri="{28A0092B-C50C-407E-A947-70E740481C1C}">
-                <a14:useLocalDpi xmlns:a14="http://schemas.microsoft.com/office/drawing/2010/main" val="0"/>
-              </a:ext>
-            </a:extLst>
-          </a:blip>
+          <a:blip r:embed="rId2"/>
           <a:stretch>
             <a:fillRect/>
           </a:stretch>
         </p:blipFill>
         <p:spPr>
           <a:xfrm>
-            <a:off x="567542" y="1817794"/>
-            <a:ext cx="7020905" cy="4353533"/>
+            <a:off x="567542" y="1811986"/>
+            <a:ext cx="7284230" cy="4554059"/>
           </a:xfrm>
           <a:prstGeom prst="rect">
             <a:avLst/>

--- a/ゲーム科1年/00_前期/ゲームプログラミングⅠ/05_画像の移動.pptx
+++ b/ゲーム科1年/00_前期/ゲームプログラミングⅠ/05_画像の移動.pptx
@@ -269,7 +269,7 @@
           <a:p>
             <a:fld id="{E9CC885B-4903-4D54-9A93-00025F12DED9}" type="datetimeFigureOut">
               <a:rPr kumimoji="1" lang="ja-JP" altLang="en-US" smtClean="0"/>
-              <a:t>2025/1/6</a:t>
+              <a:t>2025/3/3</a:t>
             </a:fld>
             <a:endParaRPr kumimoji="1" lang="ja-JP" altLang="en-US"/>
           </a:p>
@@ -499,7 +499,7 @@
           <a:p>
             <a:fld id="{E9CC885B-4903-4D54-9A93-00025F12DED9}" type="datetimeFigureOut">
               <a:rPr kumimoji="1" lang="ja-JP" altLang="en-US" smtClean="0"/>
-              <a:t>2025/1/6</a:t>
+              <a:t>2025/3/3</a:t>
             </a:fld>
             <a:endParaRPr kumimoji="1" lang="ja-JP" altLang="en-US"/>
           </a:p>
@@ -739,7 +739,7 @@
           <a:p>
             <a:fld id="{E9CC885B-4903-4D54-9A93-00025F12DED9}" type="datetimeFigureOut">
               <a:rPr kumimoji="1" lang="ja-JP" altLang="en-US" smtClean="0"/>
-              <a:t>2025/1/6</a:t>
+              <a:t>2025/3/3</a:t>
             </a:fld>
             <a:endParaRPr kumimoji="1" lang="ja-JP" altLang="en-US"/>
           </a:p>
@@ -969,7 +969,7 @@
           <a:p>
             <a:fld id="{E9CC885B-4903-4D54-9A93-00025F12DED9}" type="datetimeFigureOut">
               <a:rPr kumimoji="1" lang="ja-JP" altLang="en-US" smtClean="0"/>
-              <a:t>2025/1/6</a:t>
+              <a:t>2025/3/3</a:t>
             </a:fld>
             <a:endParaRPr kumimoji="1" lang="ja-JP" altLang="en-US"/>
           </a:p>
@@ -1244,7 +1244,7 @@
           <a:p>
             <a:fld id="{E9CC885B-4903-4D54-9A93-00025F12DED9}" type="datetimeFigureOut">
               <a:rPr kumimoji="1" lang="ja-JP" altLang="en-US" smtClean="0"/>
-              <a:t>2025/1/6</a:t>
+              <a:t>2025/3/3</a:t>
             </a:fld>
             <a:endParaRPr kumimoji="1" lang="ja-JP" altLang="en-US"/>
           </a:p>
@@ -1573,7 +1573,7 @@
           <a:p>
             <a:fld id="{E9CC885B-4903-4D54-9A93-00025F12DED9}" type="datetimeFigureOut">
               <a:rPr kumimoji="1" lang="ja-JP" altLang="en-US" smtClean="0"/>
-              <a:t>2025/1/6</a:t>
+              <a:t>2025/3/3</a:t>
             </a:fld>
             <a:endParaRPr kumimoji="1" lang="ja-JP" altLang="en-US"/>
           </a:p>
@@ -2049,7 +2049,7 @@
           <a:p>
             <a:fld id="{E9CC885B-4903-4D54-9A93-00025F12DED9}" type="datetimeFigureOut">
               <a:rPr kumimoji="1" lang="ja-JP" altLang="en-US" smtClean="0"/>
-              <a:t>2025/1/6</a:t>
+              <a:t>2025/3/3</a:t>
             </a:fld>
             <a:endParaRPr kumimoji="1" lang="ja-JP" altLang="en-US"/>
           </a:p>
@@ -2190,7 +2190,7 @@
           <a:p>
             <a:fld id="{E9CC885B-4903-4D54-9A93-00025F12DED9}" type="datetimeFigureOut">
               <a:rPr kumimoji="1" lang="ja-JP" altLang="en-US" smtClean="0"/>
-              <a:t>2025/1/6</a:t>
+              <a:t>2025/3/3</a:t>
             </a:fld>
             <a:endParaRPr kumimoji="1" lang="ja-JP" altLang="en-US"/>
           </a:p>
@@ -2303,7 +2303,7 @@
           <a:p>
             <a:fld id="{E9CC885B-4903-4D54-9A93-00025F12DED9}" type="datetimeFigureOut">
               <a:rPr kumimoji="1" lang="ja-JP" altLang="en-US" smtClean="0"/>
-              <a:t>2025/1/6</a:t>
+              <a:t>2025/3/3</a:t>
             </a:fld>
             <a:endParaRPr kumimoji="1" lang="ja-JP" altLang="en-US"/>
           </a:p>
@@ -2646,7 +2646,7 @@
           <a:p>
             <a:fld id="{E9CC885B-4903-4D54-9A93-00025F12DED9}" type="datetimeFigureOut">
               <a:rPr kumimoji="1" lang="ja-JP" altLang="en-US" smtClean="0"/>
-              <a:t>2025/1/6</a:t>
+              <a:t>2025/3/3</a:t>
             </a:fld>
             <a:endParaRPr kumimoji="1" lang="ja-JP" altLang="en-US"/>
           </a:p>
@@ -2934,7 +2934,7 @@
           <a:p>
             <a:fld id="{E9CC885B-4903-4D54-9A93-00025F12DED9}" type="datetimeFigureOut">
               <a:rPr kumimoji="1" lang="ja-JP" altLang="en-US" smtClean="0"/>
-              <a:t>2025/1/6</a:t>
+              <a:t>2025/3/3</a:t>
             </a:fld>
             <a:endParaRPr kumimoji="1" lang="ja-JP" altLang="en-US"/>
           </a:p>
@@ -3207,7 +3207,7 @@
           <a:p>
             <a:fld id="{E9CC885B-4903-4D54-9A93-00025F12DED9}" type="datetimeFigureOut">
               <a:rPr kumimoji="1" lang="ja-JP" altLang="en-US" smtClean="0"/>
-              <a:t>2025/1/6</a:t>
+              <a:t>2025/3/3</a:t>
             </a:fld>
             <a:endParaRPr kumimoji="1" lang="ja-JP" altLang="en-US"/>
           </a:p>
@@ -4239,6 +4239,58 @@
           </a:prstGeom>
         </p:spPr>
       </p:pic>
+      <p:sp>
+        <p:nvSpPr>
+          <p:cNvPr id="2" name="正方形/長方形 1">
+            <a:extLst>
+              <a:ext uri="{FF2B5EF4-FFF2-40B4-BE49-F238E27FC236}">
+                <a16:creationId xmlns:a16="http://schemas.microsoft.com/office/drawing/2014/main" id="{90168AFD-C06C-4EE8-9E81-8B7432D115E7}"/>
+              </a:ext>
+            </a:extLst>
+          </p:cNvPr>
+          <p:cNvSpPr/>
+          <p:nvPr/>
+        </p:nvSpPr>
+        <p:spPr>
+          <a:xfrm>
+            <a:off x="1864659" y="2850776"/>
+            <a:ext cx="7799294" cy="2608730"/>
+          </a:xfrm>
+          <a:prstGeom prst="rect">
+            <a:avLst/>
+          </a:prstGeom>
+          <a:noFill/>
+          <a:ln w="38100">
+            <a:solidFill>
+              <a:srgbClr val="FF0000"/>
+            </a:solidFill>
+          </a:ln>
+        </p:spPr>
+        <p:style>
+          <a:lnRef idx="2">
+            <a:schemeClr val="accent1">
+              <a:shade val="50000"/>
+            </a:schemeClr>
+          </a:lnRef>
+          <a:fillRef idx="1">
+            <a:schemeClr val="accent1"/>
+          </a:fillRef>
+          <a:effectRef idx="0">
+            <a:schemeClr val="accent1"/>
+          </a:effectRef>
+          <a:fontRef idx="minor">
+            <a:schemeClr val="lt1"/>
+          </a:fontRef>
+        </p:style>
+        <p:txBody>
+          <a:bodyPr rtlCol="0" anchor="ctr"/>
+          <a:lstStyle/>
+          <a:p>
+            <a:pPr algn="ctr"/>
+            <a:endParaRPr kumimoji="1" lang="ja-JP" altLang="en-US"/>
+          </a:p>
+        </p:txBody>
+      </p:sp>
     </p:spTree>
     <p:extLst>
       <p:ext uri="{BB962C8B-B14F-4D97-AF65-F5344CB8AC3E}">
@@ -4796,7 +4848,7 @@
               <a:t>座標の引数は</a:t>
             </a:r>
             <a:r>
-              <a:rPr lang="en-US" altLang="ja-JP" sz="2400" dirty="0">
+              <a:rPr lang="en-US" altLang="ja-JP" sz="2400" b="1" dirty="0">
                 <a:solidFill>
                   <a:srgbClr val="0070C0"/>
                 </a:solidFill>
@@ -4804,7 +4856,7 @@
               <a:t>int</a:t>
             </a:r>
             <a:r>
-              <a:rPr lang="ja-JP" altLang="en-US" sz="2400" dirty="0">
+              <a:rPr lang="ja-JP" altLang="en-US" sz="2400" b="1" dirty="0">
                 <a:solidFill>
                   <a:srgbClr val="0070C0"/>
                 </a:solidFill>

--- a/ゲーム科1年/00_前期/ゲームプログラミングⅠ/05_画像の移動.pptx
+++ b/ゲーム科1年/00_前期/ゲームプログラミングⅠ/05_画像の移動.pptx
@@ -269,7 +269,7 @@
           <a:p>
             <a:fld id="{E9CC885B-4903-4D54-9A93-00025F12DED9}" type="datetimeFigureOut">
               <a:rPr kumimoji="1" lang="ja-JP" altLang="en-US" smtClean="0"/>
-              <a:t>2025/3/3</a:t>
+              <a:t>2026/6/4</a:t>
             </a:fld>
             <a:endParaRPr kumimoji="1" lang="ja-JP" altLang="en-US"/>
           </a:p>
@@ -499,7 +499,7 @@
           <a:p>
             <a:fld id="{E9CC885B-4903-4D54-9A93-00025F12DED9}" type="datetimeFigureOut">
               <a:rPr kumimoji="1" lang="ja-JP" altLang="en-US" smtClean="0"/>
-              <a:t>2025/3/3</a:t>
+              <a:t>2026/6/4</a:t>
             </a:fld>
             <a:endParaRPr kumimoji="1" lang="ja-JP" altLang="en-US"/>
           </a:p>
@@ -739,7 +739,7 @@
           <a:p>
             <a:fld id="{E9CC885B-4903-4D54-9A93-00025F12DED9}" type="datetimeFigureOut">
               <a:rPr kumimoji="1" lang="ja-JP" altLang="en-US" smtClean="0"/>
-              <a:t>2025/3/3</a:t>
+              <a:t>2026/6/4</a:t>
             </a:fld>
             <a:endParaRPr kumimoji="1" lang="ja-JP" altLang="en-US"/>
           </a:p>
@@ -969,7 +969,7 @@
           <a:p>
             <a:fld id="{E9CC885B-4903-4D54-9A93-00025F12DED9}" type="datetimeFigureOut">
               <a:rPr kumimoji="1" lang="ja-JP" altLang="en-US" smtClean="0"/>
-              <a:t>2025/3/3</a:t>
+              <a:t>2026/6/4</a:t>
             </a:fld>
             <a:endParaRPr kumimoji="1" lang="ja-JP" altLang="en-US"/>
           </a:p>
@@ -1244,7 +1244,7 @@
           <a:p>
             <a:fld id="{E9CC885B-4903-4D54-9A93-00025F12DED9}" type="datetimeFigureOut">
               <a:rPr kumimoji="1" lang="ja-JP" altLang="en-US" smtClean="0"/>
-              <a:t>2025/3/3</a:t>
+              <a:t>2026/6/4</a:t>
             </a:fld>
             <a:endParaRPr kumimoji="1" lang="ja-JP" altLang="en-US"/>
           </a:p>
@@ -1573,7 +1573,7 @@
           <a:p>
             <a:fld id="{E9CC885B-4903-4D54-9A93-00025F12DED9}" type="datetimeFigureOut">
               <a:rPr kumimoji="1" lang="ja-JP" altLang="en-US" smtClean="0"/>
-              <a:t>2025/3/3</a:t>
+              <a:t>2026/6/4</a:t>
             </a:fld>
             <a:endParaRPr kumimoji="1" lang="ja-JP" altLang="en-US"/>
           </a:p>
@@ -2049,7 +2049,7 @@
           <a:p>
             <a:fld id="{E9CC885B-4903-4D54-9A93-00025F12DED9}" type="datetimeFigureOut">
               <a:rPr kumimoji="1" lang="ja-JP" altLang="en-US" smtClean="0"/>
-              <a:t>2025/3/3</a:t>
+              <a:t>2026/6/4</a:t>
             </a:fld>
             <a:endParaRPr kumimoji="1" lang="ja-JP" altLang="en-US"/>
           </a:p>
@@ -2190,7 +2190,7 @@
           <a:p>
             <a:fld id="{E9CC885B-4903-4D54-9A93-00025F12DED9}" type="datetimeFigureOut">
               <a:rPr kumimoji="1" lang="ja-JP" altLang="en-US" smtClean="0"/>
-              <a:t>2025/3/3</a:t>
+              <a:t>2026/6/4</a:t>
             </a:fld>
             <a:endParaRPr kumimoji="1" lang="ja-JP" altLang="en-US"/>
           </a:p>
@@ -2303,7 +2303,7 @@
           <a:p>
             <a:fld id="{E9CC885B-4903-4D54-9A93-00025F12DED9}" type="datetimeFigureOut">
               <a:rPr kumimoji="1" lang="ja-JP" altLang="en-US" smtClean="0"/>
-              <a:t>2025/3/3</a:t>
+              <a:t>2026/6/4</a:t>
             </a:fld>
             <a:endParaRPr kumimoji="1" lang="ja-JP" altLang="en-US"/>
           </a:p>
@@ -2646,7 +2646,7 @@
           <a:p>
             <a:fld id="{E9CC885B-4903-4D54-9A93-00025F12DED9}" type="datetimeFigureOut">
               <a:rPr kumimoji="1" lang="ja-JP" altLang="en-US" smtClean="0"/>
-              <a:t>2025/3/3</a:t>
+              <a:t>2026/6/4</a:t>
             </a:fld>
             <a:endParaRPr kumimoji="1" lang="ja-JP" altLang="en-US"/>
           </a:p>
@@ -2934,7 +2934,7 @@
           <a:p>
             <a:fld id="{E9CC885B-4903-4D54-9A93-00025F12DED9}" type="datetimeFigureOut">
               <a:rPr kumimoji="1" lang="ja-JP" altLang="en-US" smtClean="0"/>
-              <a:t>2025/3/3</a:t>
+              <a:t>2026/6/4</a:t>
             </a:fld>
             <a:endParaRPr kumimoji="1" lang="ja-JP" altLang="en-US"/>
           </a:p>
@@ -3207,7 +3207,7 @@
           <a:p>
             <a:fld id="{E9CC885B-4903-4D54-9A93-00025F12DED9}" type="datetimeFigureOut">
               <a:rPr kumimoji="1" lang="ja-JP" altLang="en-US" smtClean="0"/>
-              <a:t>2025/3/3</a:t>
+              <a:t>2026/6/4</a:t>
             </a:fld>
             <a:endParaRPr kumimoji="1" lang="ja-JP" altLang="en-US"/>
           </a:p>
@@ -3674,7 +3674,7 @@
         <p:spPr>
           <a:xfrm>
             <a:off x="567542" y="1216429"/>
-            <a:ext cx="7571303" cy="461665"/>
+            <a:ext cx="7263527" cy="461665"/>
           </a:xfrm>
           <a:prstGeom prst="rect">
             <a:avLst/>
@@ -3689,7 +3689,11 @@
           <a:p>
             <a:r>
               <a:rPr lang="ja-JP" altLang="en-US" sz="2400" dirty="0"/>
-              <a:t>背景に雲を追加して、動かすプログラムを作ります。</a:t>
+              <a:t>背景に雲を</a:t>
+            </a:r>
+            <a:r>
+              <a:rPr lang="ja-JP" altLang="en-US" sz="2400"/>
+              <a:t>追加して、流れるように移動させます。</a:t>
             </a:r>
             <a:endParaRPr kumimoji="1" lang="en-US" altLang="ja-JP" sz="2400" dirty="0"/>
           </a:p>

--- a/ゲーム科1年/00_前期/ゲームプログラミングⅠ/05_画像の移動.pptx
+++ b/ゲーム科1年/00_前期/ゲームプログラミングⅠ/05_画像の移動.pptx
@@ -269,7 +269,7 @@
           <a:p>
             <a:fld id="{E9CC885B-4903-4D54-9A93-00025F12DED9}" type="datetimeFigureOut">
               <a:rPr kumimoji="1" lang="ja-JP" altLang="en-US" smtClean="0"/>
-              <a:t>2026/6/4</a:t>
+              <a:t>2026/6/22</a:t>
             </a:fld>
             <a:endParaRPr kumimoji="1" lang="ja-JP" altLang="en-US"/>
           </a:p>
@@ -499,7 +499,7 @@
           <a:p>
             <a:fld id="{E9CC885B-4903-4D54-9A93-00025F12DED9}" type="datetimeFigureOut">
               <a:rPr kumimoji="1" lang="ja-JP" altLang="en-US" smtClean="0"/>
-              <a:t>2026/6/4</a:t>
+              <a:t>2026/6/22</a:t>
             </a:fld>
             <a:endParaRPr kumimoji="1" lang="ja-JP" altLang="en-US"/>
           </a:p>
@@ -739,7 +739,7 @@
           <a:p>
             <a:fld id="{E9CC885B-4903-4D54-9A93-00025F12DED9}" type="datetimeFigureOut">
               <a:rPr kumimoji="1" lang="ja-JP" altLang="en-US" smtClean="0"/>
-              <a:t>2026/6/4</a:t>
+              <a:t>2026/6/22</a:t>
             </a:fld>
             <a:endParaRPr kumimoji="1" lang="ja-JP" altLang="en-US"/>
           </a:p>
@@ -969,7 +969,7 @@
           <a:p>
             <a:fld id="{E9CC885B-4903-4D54-9A93-00025F12DED9}" type="datetimeFigureOut">
               <a:rPr kumimoji="1" lang="ja-JP" altLang="en-US" smtClean="0"/>
-              <a:t>2026/6/4</a:t>
+              <a:t>2026/6/22</a:t>
             </a:fld>
             <a:endParaRPr kumimoji="1" lang="ja-JP" altLang="en-US"/>
           </a:p>
@@ -1244,7 +1244,7 @@
           <a:p>
             <a:fld id="{E9CC885B-4903-4D54-9A93-00025F12DED9}" type="datetimeFigureOut">
               <a:rPr kumimoji="1" lang="ja-JP" altLang="en-US" smtClean="0"/>
-              <a:t>2026/6/4</a:t>
+              <a:t>2026/6/22</a:t>
             </a:fld>
             <a:endParaRPr kumimoji="1" lang="ja-JP" altLang="en-US"/>
           </a:p>
@@ -1573,7 +1573,7 @@
           <a:p>
             <a:fld id="{E9CC885B-4903-4D54-9A93-00025F12DED9}" type="datetimeFigureOut">
               <a:rPr kumimoji="1" lang="ja-JP" altLang="en-US" smtClean="0"/>
-              <a:t>2026/6/4</a:t>
+              <a:t>2026/6/22</a:t>
             </a:fld>
             <a:endParaRPr kumimoji="1" lang="ja-JP" altLang="en-US"/>
           </a:p>
@@ -2049,7 +2049,7 @@
           <a:p>
             <a:fld id="{E9CC885B-4903-4D54-9A93-00025F12DED9}" type="datetimeFigureOut">
               <a:rPr kumimoji="1" lang="ja-JP" altLang="en-US" smtClean="0"/>
-              <a:t>2026/6/4</a:t>
+              <a:t>2026/6/22</a:t>
             </a:fld>
             <a:endParaRPr kumimoji="1" lang="ja-JP" altLang="en-US"/>
           </a:p>
@@ -2190,7 +2190,7 @@
           <a:p>
             <a:fld id="{E9CC885B-4903-4D54-9A93-00025F12DED9}" type="datetimeFigureOut">
               <a:rPr kumimoji="1" lang="ja-JP" altLang="en-US" smtClean="0"/>
-              <a:t>2026/6/4</a:t>
+              <a:t>2026/6/22</a:t>
             </a:fld>
             <a:endParaRPr kumimoji="1" lang="ja-JP" altLang="en-US"/>
           </a:p>
@@ -2303,7 +2303,7 @@
           <a:p>
             <a:fld id="{E9CC885B-4903-4D54-9A93-00025F12DED9}" type="datetimeFigureOut">
               <a:rPr kumimoji="1" lang="ja-JP" altLang="en-US" smtClean="0"/>
-              <a:t>2026/6/4</a:t>
+              <a:t>2026/6/22</a:t>
             </a:fld>
             <a:endParaRPr kumimoji="1" lang="ja-JP" altLang="en-US"/>
           </a:p>
@@ -2646,7 +2646,7 @@
           <a:p>
             <a:fld id="{E9CC885B-4903-4D54-9A93-00025F12DED9}" type="datetimeFigureOut">
               <a:rPr kumimoji="1" lang="ja-JP" altLang="en-US" smtClean="0"/>
-              <a:t>2026/6/4</a:t>
+              <a:t>2026/6/22</a:t>
             </a:fld>
             <a:endParaRPr kumimoji="1" lang="ja-JP" altLang="en-US"/>
           </a:p>
@@ -2934,7 +2934,7 @@
           <a:p>
             <a:fld id="{E9CC885B-4903-4D54-9A93-00025F12DED9}" type="datetimeFigureOut">
               <a:rPr kumimoji="1" lang="ja-JP" altLang="en-US" smtClean="0"/>
-              <a:t>2026/6/4</a:t>
+              <a:t>2026/6/22</a:t>
             </a:fld>
             <a:endParaRPr kumimoji="1" lang="ja-JP" altLang="en-US"/>
           </a:p>
@@ -3207,7 +3207,7 @@
           <a:p>
             <a:fld id="{E9CC885B-4903-4D54-9A93-00025F12DED9}" type="datetimeFigureOut">
               <a:rPr kumimoji="1" lang="ja-JP" altLang="en-US" smtClean="0"/>
-              <a:t>2026/6/4</a:t>
+              <a:t>2026/6/22</a:t>
             </a:fld>
             <a:endParaRPr kumimoji="1" lang="ja-JP" altLang="en-US"/>
           </a:p>
@@ -5260,11 +5260,23 @@
                   <a:srgbClr val="FF0000"/>
                 </a:solidFill>
               </a:rPr>
-              <a:t>座標と移動量の変数</a:t>
+              <a:t>座標</a:t>
             </a:r>
             <a:r>
               <a:rPr kumimoji="1" lang="ja-JP" altLang="en-US" sz="2400" dirty="0"/>
-              <a:t>になります。</a:t>
+              <a:t>と</a:t>
+            </a:r>
+            <a:r>
+              <a:rPr kumimoji="1" lang="ja-JP" altLang="en-US" sz="2400" b="1" dirty="0">
+                <a:solidFill>
+                  <a:srgbClr val="FF0000"/>
+                </a:solidFill>
+              </a:rPr>
+              <a:t>移動量</a:t>
+            </a:r>
+            <a:r>
+              <a:rPr kumimoji="1" lang="ja-JP" altLang="en-US" sz="2400" dirty="0"/>
+              <a:t>の変数になります。</a:t>
             </a:r>
             <a:endParaRPr kumimoji="1" lang="en-US" altLang="ja-JP" sz="2400" dirty="0"/>
           </a:p>
@@ -5440,7 +5452,7 @@
         <p:spPr>
           <a:xfrm>
             <a:off x="567542" y="1216429"/>
-            <a:ext cx="9897261" cy="461665"/>
+            <a:ext cx="7571303" cy="461665"/>
           </a:xfrm>
           <a:prstGeom prst="rect">
             <a:avLst/>
@@ -5456,14 +5468,6 @@
             <a:r>
               <a:rPr kumimoji="1" lang="ja-JP" altLang="en-US" sz="2400" dirty="0"/>
               <a:t>初期位置や移動量の設定は</a:t>
-            </a:r>
-            <a:r>
-              <a:rPr kumimoji="1" lang="en-US" altLang="ja-JP" sz="2400" dirty="0"/>
-              <a:t>1</a:t>
-            </a:r>
-            <a:r>
-              <a:rPr kumimoji="1" lang="ja-JP" altLang="en-US" sz="2400" dirty="0"/>
-              <a:t>度で良いので、</a:t>
             </a:r>
             <a:r>
               <a:rPr lang="ja-JP" altLang="en-US" sz="2400" dirty="0"/>
